--- a/docs/presentation_deck.pptx
+++ b/docs/presentation_deck.pptx
@@ -3492,7 +3492,7 @@
                 </a:solidFill>
                 <a:latin typeface="Segoe UI"/>
               </a:rPr>
-              <a:t>Syn Bank holds 5% of a R3.8 trillion flow.</a:t>
+              <a:t>Syn Bank holds 4.5% of a R4.29 trillion flow.</a:t>
             </a:r>
           </a:p>
           <a:p>
@@ -3508,7 +3508,7 @@
                 </a:solidFill>
                 <a:latin typeface="Segoe UI"/>
               </a:rPr>
-              <a:t>The other 95% is worth R8.7bn a year in fees —</a:t>
+              <a:t>The other 95.5% is worth R9.65bn a year in fees —</a:t>
             </a:r>
           </a:p>
           <a:p>
@@ -4362,7 +4362,7 @@
                 </a:solidFill>
                 <a:latin typeface="Segoe UI"/>
               </a:rPr>
-              <a:t>301×</a:t>
+              <a:t>2,757×</a:t>
             </a:r>
           </a:p>
         </p:txBody>
@@ -5173,7 +5173,7 @@
                 </a:solidFill>
                 <a:latin typeface="Segoe UI"/>
               </a:rPr>
-              <a:t>Syn Bank holds 5% of its clients' banking flow</a:t>
+              <a:t>Syn Bank holds 4.5% of its clients' banking flow</a:t>
             </a:r>
           </a:p>
         </p:txBody>
@@ -5256,7 +5256,7 @@
                 </a:solidFill>
                 <a:latin typeface="Segoe UI"/>
               </a:rPr>
-              <a:t>5.0%</a:t>
+              <a:t>4.5%</a:t>
             </a:r>
           </a:p>
         </p:txBody>
@@ -5334,7 +5334,7 @@
                 </a:solidFill>
                 <a:latin typeface="Segoe UI"/>
               </a:rPr>
-              <a:t>R3.80tn</a:t>
+              <a:t>R4.29tn</a:t>
             </a:r>
           </a:p>
         </p:txBody>
@@ -5412,7 +5412,7 @@
                 </a:solidFill>
                 <a:latin typeface="Segoe UI"/>
               </a:rPr>
-              <a:t>R3.61tn</a:t>
+              <a:t>R4.10tn</a:t>
             </a:r>
           </a:p>
         </p:txBody>
@@ -5490,7 +5490,7 @@
                 </a:solidFill>
                 <a:latin typeface="Segoe UI"/>
               </a:rPr>
-              <a:t>R8.68bn</a:t>
+              <a:t>R9.65bn</a:t>
             </a:r>
           </a:p>
         </p:txBody>
@@ -6950,7 +6950,7 @@
                 </a:solidFill>
                 <a:latin typeface="Segoe UI"/>
               </a:rPr>
-              <a:t>4.0% and 6.7%.</a:t>
+              <a:t>3.6% and 5.9%.</a:t>
             </a:r>
           </a:p>
           <a:p>
@@ -7379,7 +7379,7 @@
                 </a:solidFill>
                 <a:latin typeface="Segoe UI"/>
               </a:rPr>
-              <a:t>•  One revenue figure (Sanlam) is an estimate —</a:t>
+              <a:t>•  Revenue basis differs by industry and is</a:t>
             </a:r>
           </a:p>
           <a:p>
@@ -7395,7 +7395,7 @@
                 </a:solidFill>
                 <a:latin typeface="Segoe UI"/>
               </a:rPr>
-              <a:t>   flagged and confidence-penalised.</a:t>
+              <a:t>   recorded per client.</a:t>
             </a:r>
           </a:p>
           <a:p>

--- a/docs/presentation_deck.pptx
+++ b/docs/presentation_deck.pptx
@@ -6934,7 +6934,7 @@
                 </a:solidFill>
                 <a:latin typeface="Segoe UI"/>
               </a:rPr>
-              <a:t>Portfolio share moves only between</a:t>
+              <a:t>Portfolio-wide average share moves only</a:t>
             </a:r>
           </a:p>
           <a:p>
@@ -6950,7 +6950,23 @@
                 </a:solidFill>
                 <a:latin typeface="Segoe UI"/>
               </a:rPr>
-              <a:t>3.6% and 5.9%.</a:t>
+              <a:t>between 3.6% and 5.9% (not the</a:t>
+            </a:r>
+          </a:p>
+          <a:p>
+            <a:pPr algn="l">
+              <a:lnSpc>
+                <a:spcPct val="132000"/>
+              </a:lnSpc>
+            </a:pPr>
+            <a:r>
+              <a:rPr sz="1350" b="0">
+                <a:solidFill>
+                  <a:srgbClr val="52514E"/>
+                </a:solidFill>
+                <a:latin typeface="Segoe UI"/>
+              </a:rPr>
+              <a:t>0.1%-67.8% per-client range).</a:t>
             </a:r>
           </a:p>
           <a:p>
